--- a/viewers/pptx/e2e/fixtures/text-warp-fidelity.pptx
+++ b/viewers/pptx/e2e/fixtures/text-warp-fidelity.pptx
@@ -444,7 +444,7 @@
                 <a:solidFill>
                   <a:srgbClr val="2E75B6"/>
                 </a:solidFill>
-                <a:latin typeface="Arial"/>
+                <a:latin typeface="PptxE2EWideGlyphNoOutlineMatch"/>
               </a:rPr>
               <a:t>MOM</a:t>
             </a:r>
